--- a/downloads/cinematic-dark-pitch.pptx
+++ b/downloads/cinematic-dark-pitch.pptx
@@ -3672,7 +3672,7 @@
                 </a:solidFill>
                 <a:latin typeface="Calibri"/>
               </a:rPr>
-              <a:t>פתרונות שנפרסים תוך ימים, לא חודשים</a:t>
+              <a:t>פתרונות שעולים לאוויר תוך ימים, לא חודשים</a:t>
             </a:r>
           </a:p>
         </p:txBody>
@@ -3823,7 +3823,7 @@
                 </a:solidFill>
                 <a:latin typeface="Calibri"/>
               </a:rPr>
-              <a:t>אתם יודעים בדיוק איפה כל שקל הולך</a:t>
+              <a:t>אתם יודעים בדיוק לאן הולך כל שקל</a:t>
             </a:r>
           </a:p>
         </p:txBody>
@@ -4486,7 +4486,7 @@
                 </a:solidFill>
                 <a:latin typeface="Calibri"/>
               </a:rPr>
-              <a:t>מבצעים בטכנולוגיה מתקדמת ובזמן אמת</a:t>
+              <a:t>מפתחים בטכנולוגיה מתקדמת — מהר ובשקיפות</a:t>
             </a:r>
           </a:p>
         </p:txBody>
@@ -6170,7 +6170,7 @@
                 </a:solidFill>
                 <a:latin typeface="Calibri"/>
               </a:rPr>
-              <a:t>ליווי אישי מהרגע הראשון ועד להשקה</a:t>
+              <a:t>ליווי אישי מהרגע הראשון ועד ההשקה</a:t>
             </a:r>
           </a:p>
         </p:txBody>
@@ -6598,7 +6598,7 @@
                 </a:solidFill>
                 <a:latin typeface="Calibri"/>
               </a:rPr>
-              <a:t>תודה שהקדשתם מזמנכם</a:t>
+              <a:t>תודה שהקדשתם לנו מזמנכם</a:t>
             </a:r>
           </a:p>
         </p:txBody>
